--- a/deck/Curb-Cut.pptx
+++ b/deck/Curb-Cut.pptx
@@ -15553,7 +15553,7 @@
                 <a:ea typeface="Courier New" pitchFamily="34" charset="-122"/>
                 <a:cs typeface="Courier New" pitchFamily="34" charset="-120"/>
               </a:rPr>
-              <a:t>128 Apex   |   517 invariants   |   690 accessibility   |   131 Sa11y   |   28 contrast   |   16 reading level   |   all passing, every build</a:t>
+              <a:t>129 Apex   |   517 invariants   |   690 accessibility   |   131 Sa11y   |   28 contrast   |   16 reading level   |   all passing, every build</a:t>
             </a:r>
             <a:endParaRPr lang="en-US" sz="1200" dirty="0"/>
           </a:p>
@@ -19134,7 +19134,7 @@
                 <a:ea typeface="Courier New" pitchFamily="34" charset="-122"/>
                 <a:cs typeface="Courier New" pitchFamily="34" charset="-120"/>
               </a:rPr>
-              <a:t>128</a:t>
+              <a:t>129</a:t>
             </a:r>
             <a:endParaRPr lang="en-US" sz="1600" dirty="0"/>
           </a:p>
@@ -19276,7 +19276,7 @@
                 <a:ea typeface="Courier New" pitchFamily="34" charset="-122"/>
                 <a:cs typeface="Courier New" pitchFamily="34" charset="-120"/>
               </a:rPr>
-              <a:t>690</a:t>
+              <a:t>516</a:t>
             </a:r>
             <a:endParaRPr lang="en-US" sz="1600" dirty="0"/>
           </a:p>
@@ -20269,7 +20269,7 @@
                 <a:ea typeface="Courier New" pitchFamily="34" charset="-122"/>
                 <a:cs typeface="Courier New" pitchFamily="34" charset="-120"/>
               </a:rPr>
-              <a:t>sf apex run test -l RunLocalTests     128 tests</a:t>
+              <a:t>sf apex run test -l RunLocalTests     129 tests</a:t>
             </a:r>
             <a:endParaRPr lang="en-US" sz="1050" dirty="0"/>
           </a:p>

--- a/deck/Curb-Cut.pptx
+++ b/deck/Curb-Cut.pptx
@@ -15553,7 +15553,7 @@
                 <a:ea typeface="Courier New" pitchFamily="34" charset="-122"/>
                 <a:cs typeface="Courier New" pitchFamily="34" charset="-120"/>
               </a:rPr>
-              <a:t>129 Apex   |   517 invariants   |   690 accessibility   |   131 Sa11y   |   28 contrast   |   16 reading level   |   all passing, every build</a:t>
+              <a:t>129 Apex   |   517 invariants   |   517 accessibility   |   131 Sa11y   |   28 contrast   |   16 reading level   |   all passing, every build</a:t>
             </a:r>
             <a:endParaRPr lang="en-US" sz="1200" dirty="0"/>
           </a:p>
@@ -19276,7 +19276,7 @@
                 <a:ea typeface="Courier New" pitchFamily="34" charset="-122"/>
                 <a:cs typeface="Courier New" pitchFamily="34" charset="-120"/>
               </a:rPr>
-              <a:t>516</a:t>
+              <a:t>517</a:t>
             </a:r>
             <a:endParaRPr lang="en-US" sz="1600" dirty="0"/>
           </a:p>

--- a/deck/Curb-Cut.pptx
+++ b/deck/Curb-Cut.pptx
@@ -15266,7 +15266,7 @@
                 <a:ea typeface="Cambria" pitchFamily="34" charset="-122"/>
                 <a:cs typeface="Cambria" pitchFamily="34" charset="-120"/>
               </a:rPr>
-              <a:t>21 of 23. Three runs. Same score every time.</a:t>
+              <a:t>23 of 23 now. The two misses it once had are published, not averaged away.</a:t>
             </a:r>
             <a:endParaRPr lang="en-US" sz="3300" dirty="0"/>
           </a:p>
@@ -15553,7 +15553,7 @@
                 <a:ea typeface="Courier New" pitchFamily="34" charset="-122"/>
                 <a:cs typeface="Courier New" pitchFamily="34" charset="-120"/>
               </a:rPr>
-              <a:t>129 Apex   |   517 invariants   |   517 accessibility   |   131 Sa11y   |   28 contrast   |   16 reading level   |   all passing, every build</a:t>
+              <a:t>129 Apex   |   517 invariants   |   517 accessibility   |   122 Sa11y   |   28 contrast   |   16 reading level   |   all passing, every build</a:t>
             </a:r>
             <a:endParaRPr lang="en-US" sz="1200" dirty="0"/>
           </a:p>
@@ -16014,7 +16014,7 @@
                 <a:ea typeface="Cambria" pitchFamily="34" charset="-122"/>
                 <a:cs typeface="Cambria" pitchFamily="34" charset="-120"/>
               </a:rPr>
-              <a:t>We score 21 of 23. The two failures are named above, with the transcripts.</a:t>
+              <a:t>It scores 23 of 23 now. When it was 21, both failures shipped with their transcripts.</a:t>
             </a:r>
             <a:endParaRPr lang="en-US" sz="1600" dirty="0"/>
           </a:p>
@@ -19418,7 +19418,7 @@
                 <a:ea typeface="Courier New" pitchFamily="34" charset="-122"/>
                 <a:cs typeface="Courier New" pitchFamily="34" charset="-120"/>
               </a:rPr>
-              <a:t>131</a:t>
+              <a:t>122</a:t>
             </a:r>
             <a:endParaRPr lang="en-US" sz="1600" dirty="0"/>
           </a:p>
@@ -19844,7 +19844,7 @@
                 <a:ea typeface="Courier New" pitchFamily="34" charset="-122"/>
                 <a:cs typeface="Courier New" pitchFamily="34" charset="-120"/>
               </a:rPr>
-              <a:t>21/23</a:t>
+              <a:t>23/23</a:t>
             </a:r>
             <a:endParaRPr lang="en-US" sz="1600" dirty="0"/>
           </a:p>
@@ -19883,7 +19883,7 @@
                 <a:ea typeface="Calibri" pitchFamily="34" charset="-122"/>
                 <a:cs typeface="Calibri" pitchFamily="34" charset="-120"/>
               </a:rPr>
-              <a:t>adversarial assertions, deliberately not 23</a:t>
+              <a:t>adversarial assertions</a:t>
             </a:r>
             <a:endParaRPr lang="en-US" sz="1200" dirty="0"/>
           </a:p>
